--- a/output/presentation/REFOUND_PROJECT_MIDTERM_2026-10-02_v5_improved.pptx
+++ b/output/presentation/REFOUND_PROJECT_MIDTERM_2026-10-02_v5_improved.pptx
@@ -561,12 +561,12 @@
           </a:p>
           <a:p xmlns:a="http://schemas.openxmlformats.org/drawingml/2006/main">
             <a:r>
-              <a:t>- output/maintenance/2026-09-22-quick-reset/VALIDATION.json</a:t>
-            </a:r>
-          </a:p>
-          <a:p xmlns:a="http://schemas.openxmlformats.org/drawingml/2006/main">
-            <a:r>
-              <a:t>- REFOUND_WINDOWS_HOTSPOT_GUIDE.md</a:t>
+              <a:t>- output/records/2026-09-22-quick-reset/VALIDATION.json</a:t>
+            </a:r>
+          </a:p>
+          <a:p xmlns:a="http://schemas.openxmlformats.org/drawingml/2006/main">
+            <a:r>
+              <a:t>- docs/guides/WINDOWS_HOTSPOT_GUIDE.md</a:t>
             </a:r>
           </a:p>
         </p:txBody>
@@ -841,7 +841,7 @@
           </a:p>
           <a:p xmlns:a="http://schemas.openxmlformats.org/drawingml/2006/main">
             <a:r>
-              <a:t>- docs/ARCHITECTURE_REVIEW_2026-09-18.md</a:t>
+              <a:t>- docs/development/ARCHITECTURE_REVIEW_2026-09-18.md</a:t>
             </a:r>
           </a:p>
           <a:p xmlns:a="http://schemas.openxmlformats.org/drawingml/2006/main">
@@ -931,12 +931,12 @@
           </a:p>
           <a:p xmlns:a="http://schemas.openxmlformats.org/drawingml/2006/main">
             <a:r>
-              <a:t>- docs/LIVE_FLOW_REVIEW_2026-09-18.md</a:t>
-            </a:r>
-          </a:p>
-          <a:p xmlns:a="http://schemas.openxmlformats.org/drawingml/2006/main">
-            <a:r>
-              <a:t>- output/maintenance/2026-09-18-live-flow-review/browser-classified-detail.png</a:t>
+              <a:t>- docs/development/LIVE_FLOW_REVIEW_2026-09-18.md</a:t>
+            </a:r>
+          </a:p>
+          <a:p xmlns:a="http://schemas.openxmlformats.org/drawingml/2006/main">
+            <a:r>
+              <a:t>- docs/presentation/midterm/assets/detail.png</a:t>
             </a:r>
           </a:p>
           <a:p xmlns:a="http://schemas.openxmlformats.org/drawingml/2006/main">
@@ -1036,7 +1036,7 @@
           </a:p>
           <a:p xmlns:a="http://schemas.openxmlformats.org/drawingml/2006/main">
             <a:r>
-              <a:t>- output/maintenance/2026-09-22-quick-reset/VALIDATION.json</a:t>
+              <a:t>- output/records/2026-09-22-quick-reset/VALIDATION.json</a:t>
             </a:r>
           </a:p>
           <a:p xmlns:a="http://schemas.openxmlformats.org/drawingml/2006/main">
@@ -1121,7 +1121,7 @@
           </a:p>
           <a:p xmlns:a="http://schemas.openxmlformats.org/drawingml/2006/main">
             <a:r>
-              <a:t>- docs/LIVE_FLOW_REVIEW_2026-09-18.md</a:t>
+              <a:t>- docs/development/LIVE_FLOW_REVIEW_2026-09-18.md</a:t>
             </a:r>
           </a:p>
           <a:p xmlns:a="http://schemas.openxmlformats.org/drawingml/2006/main">
@@ -1131,7 +1131,7 @@
           </a:p>
           <a:p xmlns:a="http://schemas.openxmlformats.org/drawingml/2006/main">
             <a:r>
-              <a:t>- REFOUND_WINDOWS_HOTSPOT_GUIDE.md</a:t>
+              <a:t>- docs/guides/WINDOWS_HOTSPOT_GUIDE.md</a:t>
             </a:r>
           </a:p>
           <a:p xmlns:a="http://schemas.openxmlformats.org/drawingml/2006/main">
@@ -1326,12 +1326,12 @@
           </a:p>
           <a:p xmlns:a="http://schemas.openxmlformats.org/drawingml/2006/main">
             <a:r>
-              <a:t>- output/maintenance/2026-09-22-network-plan/SESSION_STATUS.json</a:t>
-            </a:r>
-          </a:p>
-          <a:p xmlns:a="http://schemas.openxmlformats.org/drawingml/2006/main">
-            <a:r>
-              <a:t>- REFOUND_WINDOWS_HOTSPOT_GUIDE.md</a:t>
+              <a:t>- output/records/2026-09-22-network-plan/SESSION_STATUS.json</a:t>
+            </a:r>
+          </a:p>
+          <a:p xmlns:a="http://schemas.openxmlformats.org/drawingml/2006/main">
+            <a:r>
+              <a:t>- docs/guides/WINDOWS_HOTSPOT_GUIDE.md</a:t>
             </a:r>
           </a:p>
           <a:p xmlns:a="http://schemas.openxmlformats.org/drawingml/2006/main">
@@ -1416,7 +1416,7 @@
           </a:p>
           <a:p xmlns:a="http://schemas.openxmlformats.org/drawingml/2006/main">
             <a:r>
-              <a:t>- REFOUND_WINDOWS_HOTSPOT_GUIDE.md</a:t>
+              <a:t>- docs/guides/WINDOWS_HOTSPOT_GUIDE.md</a:t>
             </a:r>
           </a:p>
           <a:p xmlns:a="http://schemas.openxmlformats.org/drawingml/2006/main">
@@ -1696,12 +1696,12 @@
           </a:p>
           <a:p xmlns:a="http://schemas.openxmlformats.org/drawingml/2006/main">
             <a:r>
-              <a:t>- output/maintenance/2026-09-30-sync-review/REVIEW.md</a:t>
-            </a:r>
-          </a:p>
-          <a:p xmlns:a="http://schemas.openxmlformats.org/drawingml/2006/main">
-            <a:r>
-              <a:t>- output/maintenance/2026-09-22-quick-reset/VALIDATION.json</a:t>
+              <a:t>- output/records/2026-09-30-sync-review/REVIEW.md</a:t>
+            </a:r>
+          </a:p>
+          <a:p xmlns:a="http://schemas.openxmlformats.org/drawingml/2006/main">
+            <a:r>
+              <a:t>- output/records/2026-09-22-quick-reset/VALIDATION.json</a:t>
             </a:r>
           </a:p>
           <a:p xmlns:a="http://schemas.openxmlformats.org/drawingml/2006/main">
@@ -1801,7 +1801,7 @@
           </a:p>
           <a:p xmlns:a="http://schemas.openxmlformats.org/drawingml/2006/main">
             <a:r>
-              <a:t>- output/maintenance/2026-09-22-network-plan/SESSION_STATUS.json</a:t>
+              <a:t>- output/records/2026-09-22-network-plan/SESSION_STATUS.json</a:t>
             </a:r>
           </a:p>
           <a:p xmlns:a="http://schemas.openxmlformats.org/drawingml/2006/main">
@@ -1811,7 +1811,7 @@
           </a:p>
           <a:p xmlns:a="http://schemas.openxmlformats.org/drawingml/2006/main">
             <a:r>
-              <a:t>- REFOUND_WINDOWS_HOTSPOT_GUIDE.md</a:t>
+              <a:t>- docs/guides/WINDOWS_HOTSPOT_GUIDE.md</a:t>
             </a:r>
           </a:p>
           <a:p xmlns:a="http://schemas.openxmlformats.org/drawingml/2006/main">
@@ -1896,22 +1896,22 @@
           </a:p>
           <a:p xmlns:a="http://schemas.openxmlformats.org/drawingml/2006/main">
             <a:r>
-              <a:t>- docs/VISION_REVIEW_2026-09-18.md</a:t>
-            </a:r>
-          </a:p>
-          <a:p xmlns:a="http://schemas.openxmlformats.org/drawingml/2006/main">
-            <a:r>
-              <a:t>- docs/ARCHITECTURE_REVIEW_2026-09-18.md</a:t>
-            </a:r>
-          </a:p>
-          <a:p xmlns:a="http://schemas.openxmlformats.org/drawingml/2006/main">
-            <a:r>
-              <a:t>- docs/LIVE_FLOW_REVIEW_2026-09-18.md</a:t>
-            </a:r>
-          </a:p>
-          <a:p xmlns:a="http://schemas.openxmlformats.org/drawingml/2006/main">
-            <a:r>
-              <a:t>- REFOUND_WINDOWS_HOTSPOT_GUIDE.md</a:t>
+              <a:t>- docs/development/VISION_REVIEW_2026-09-18.md</a:t>
+            </a:r>
+          </a:p>
+          <a:p xmlns:a="http://schemas.openxmlformats.org/drawingml/2006/main">
+            <a:r>
+              <a:t>- docs/development/ARCHITECTURE_REVIEW_2026-09-18.md</a:t>
+            </a:r>
+          </a:p>
+          <a:p xmlns:a="http://schemas.openxmlformats.org/drawingml/2006/main">
+            <a:r>
+              <a:t>- docs/development/LIVE_FLOW_REVIEW_2026-09-18.md</a:t>
+            </a:r>
+          </a:p>
+          <a:p xmlns:a="http://schemas.openxmlformats.org/drawingml/2006/main">
+            <a:r>
+              <a:t>- docs/guides/WINDOWS_HOTSPOT_GUIDE.md</a:t>
             </a:r>
           </a:p>
           <a:p xmlns:a="http://schemas.openxmlformats.org/drawingml/2006/main">
@@ -1996,12 +1996,12 @@
           </a:p>
           <a:p xmlns:a="http://schemas.openxmlformats.org/drawingml/2006/main">
             <a:r>
-              <a:t>- docs/VISION_REVIEW_2026-09-18.md</a:t>
-            </a:r>
-          </a:p>
-          <a:p xmlns:a="http://schemas.openxmlformats.org/drawingml/2006/main">
-            <a:r>
-              <a:t>- output/maintenance/2026-09-18-vision-review/benchmark-comparison.json</a:t>
+              <a:t>- docs/development/VISION_REVIEW_2026-09-18.md</a:t>
+            </a:r>
+          </a:p>
+          <a:p xmlns:a="http://schemas.openxmlformats.org/drawingml/2006/main">
+            <a:r>
+              <a:t>- output/records/2026-09-18-vision-review/benchmark-comparison.json</a:t>
             </a:r>
           </a:p>
           <a:p xmlns:a="http://schemas.openxmlformats.org/drawingml/2006/main">
@@ -2091,7 +2091,7 @@
           </a:p>
           <a:p xmlns:a="http://schemas.openxmlformats.org/drawingml/2006/main">
             <a:r>
-              <a:t>- REFOUND_WINDOWS_HOTSPOT_GUIDE.md</a:t>
+              <a:t>- docs/guides/WINDOWS_HOTSPOT_GUIDE.md</a:t>
             </a:r>
           </a:p>
           <a:p xmlns:a="http://schemas.openxmlformats.org/drawingml/2006/main">
@@ -2186,7 +2186,7 @@
           </a:p>
           <a:p xmlns:a="http://schemas.openxmlformats.org/drawingml/2006/main">
             <a:r>
-              <a:t>- REFOUND_WINDOWS_HOTSPOT_GUIDE.md</a:t>
+              <a:t>- docs/guides/WINDOWS_HOTSPOT_GUIDE.md</a:t>
             </a:r>
           </a:p>
           <a:p xmlns:a="http://schemas.openxmlformats.org/drawingml/2006/main">
@@ -2461,17 +2461,17 @@
           </a:p>
           <a:p xmlns:a="http://schemas.openxmlformats.org/drawingml/2006/main">
             <a:r>
-              <a:t>- REFOUND_WINDOWS_HOTSPOT_GUIDE.md</a:t>
-            </a:r>
-          </a:p>
-          <a:p xmlns:a="http://schemas.openxmlformats.org/drawingml/2006/main">
-            <a:r>
-              <a:t>- output/maintenance/2026-09-22-quick-reset/VALIDATION.json</a:t>
-            </a:r>
-          </a:p>
-          <a:p xmlns:a="http://schemas.openxmlformats.org/drawingml/2006/main">
-            <a:r>
-              <a:t>시연을 다시 시작할 때마다 초기화할 필요는 없다. 필요한 기록이 있으면 보존하고, 초기화 전 물품을 카메라 범위에서 치운다. 실행 7단계·종료 4단계·이름 오류 5단계는 REFOUND_WINDOWS_HOTSPOT_GUIDE.md를 따른다. 현재 시연 연결 성공 보고와 새 구성 전원 재인가 성공은 별개다. 내부 접속 주소·키는 발표자료에 적지 않았다.</a:t>
+              <a:t>- docs/guides/WINDOWS_HOTSPOT_GUIDE.md</a:t>
+            </a:r>
+          </a:p>
+          <a:p xmlns:a="http://schemas.openxmlformats.org/drawingml/2006/main">
+            <a:r>
+              <a:t>- output/records/2026-09-22-quick-reset/VALIDATION.json</a:t>
+            </a:r>
+          </a:p>
+          <a:p xmlns:a="http://schemas.openxmlformats.org/drawingml/2006/main">
+            <a:r>
+              <a:t>시연을 다시 시작할 때마다 초기화할 필요는 없다. 필요한 기록이 있으면 보존하고, 초기화 전 물품을 카메라 범위에서 치운다. 실행 7단계·종료 4단계·이름 오류 5단계는 docs/guides/WINDOWS_HOTSPOT_GUIDE.md를 따른다. 현재 시연 연결 성공 보고와 새 구성 전원 재인가 성공은 별개다. 내부 접속 주소·키는 발표자료에 적지 않았다.</a:t>
             </a:r>
           </a:p>
         </p:txBody>
@@ -2931,7 +2931,7 @@
           </a:p>
           <a:p xmlns:a="http://schemas.openxmlformats.org/drawingml/2006/main">
             <a:r>
-              <a:t>- output/maintenance/2026-09-22-network-plan/SESSION_STATUS.json</a:t>
+              <a:t>- output/records/2026-09-22-network-plan/SESSION_STATUS.json</a:t>
             </a:r>
           </a:p>
           <a:p xmlns:a="http://schemas.openxmlformats.org/drawingml/2006/main">
@@ -3101,22 +3101,22 @@
           </a:p>
           <a:p xmlns:a="http://schemas.openxmlformats.org/drawingml/2006/main">
             <a:r>
-              <a:t>- docs/VISION_REVIEW_2026-09-18.md</a:t>
-            </a:r>
-          </a:p>
-          <a:p xmlns:a="http://schemas.openxmlformats.org/drawingml/2006/main">
-            <a:r>
-              <a:t>- output/maintenance/2026-09-22-network-plan/SESSION_STATUS.json</a:t>
-            </a:r>
-          </a:p>
-          <a:p xmlns:a="http://schemas.openxmlformats.org/drawingml/2006/main">
-            <a:r>
-              <a:t>- REFOUND_WINDOWS_HOTSPOT_GUIDE.md</a:t>
-            </a:r>
-          </a:p>
-          <a:p xmlns:a="http://schemas.openxmlformats.org/drawingml/2006/main">
-            <a:r>
-              <a:t>- output/maintenance/2026-09-30-sync-review/REVIEW.md</a:t>
+              <a:t>- docs/development/VISION_REVIEW_2026-09-18.md</a:t>
+            </a:r>
+          </a:p>
+          <a:p xmlns:a="http://schemas.openxmlformats.org/drawingml/2006/main">
+            <a:r>
+              <a:t>- output/records/2026-09-22-network-plan/SESSION_STATUS.json</a:t>
+            </a:r>
+          </a:p>
+          <a:p xmlns:a="http://schemas.openxmlformats.org/drawingml/2006/main">
+            <a:r>
+              <a:t>- docs/guides/WINDOWS_HOTSPOT_GUIDE.md</a:t>
+            </a:r>
+          </a:p>
+          <a:p xmlns:a="http://schemas.openxmlformats.org/drawingml/2006/main">
+            <a:r>
+              <a:t>- output/records/2026-09-30-sync-review/REVIEW.md</a:t>
             </a:r>
           </a:p>
           <a:p xmlns:a="http://schemas.openxmlformats.org/drawingml/2006/main">
@@ -3211,12 +3211,12 @@
           </a:p>
           <a:p xmlns:a="http://schemas.openxmlformats.org/drawingml/2006/main">
             <a:r>
-              <a:t>- REFOUND_WINDOWS_HOTSPOT_GUIDE.md</a:t>
-            </a:r>
-          </a:p>
-          <a:p xmlns:a="http://schemas.openxmlformats.org/drawingml/2006/main">
-            <a:r>
-              <a:t>- output/maintenance/2026-09-30-sync-review/REVIEW.md</a:t>
+              <a:t>- docs/guides/WINDOWS_HOTSPOT_GUIDE.md</a:t>
+            </a:r>
+          </a:p>
+          <a:p xmlns:a="http://schemas.openxmlformats.org/drawingml/2006/main">
+            <a:r>
+              <a:t>- output/records/2026-09-30-sync-review/REVIEW.md</a:t>
             </a:r>
           </a:p>
           <a:p xmlns:a="http://schemas.openxmlformats.org/drawingml/2006/main">
